--- a/decks/Bhagavadgita_Concept_KG_en.pptx
+++ b/decks/Bhagavadgita_Concept_KG_en.pptx
@@ -2360,7 +2360,7 @@
                 <a:ea typeface="Arial" pitchFamily="34" charset="-122"/>
                 <a:cs typeface="Arial" pitchFamily="34" charset="-120"/>
               </a:rPr>
-              <a:t>92 concepts · 101 relations · 12 tiers</a:t>
+              <a:t>96 concepts · 99 relations · 12 tiers</a:t>
             </a:r>
             <a:endParaRPr lang="en-US" sz="1200" dirty="0"/>
           </a:p>
@@ -3677,7 +3677,7 @@
                 <a:ea typeface="Cambria" pitchFamily="34" charset="-122"/>
                 <a:cs typeface="Cambria" pitchFamily="34" charset="-120"/>
               </a:rPr>
-              <a:t>92</a:t>
+              <a:t>96</a:t>
             </a:r>
             <a:endParaRPr lang="en-US" sz="6400" dirty="0"/>
           </a:p>
@@ -3833,7 +3833,7 @@
                 <a:ea typeface="Cambria" pitchFamily="34" charset="-122"/>
                 <a:cs typeface="Cambria" pitchFamily="34" charset="-120"/>
               </a:rPr>
-              <a:t>101</a:t>
+              <a:t>99</a:t>
             </a:r>
             <a:endParaRPr lang="en-US" sz="6400" dirty="0"/>
           </a:p>
@@ -4126,7 +4126,7 @@
                 <a:ea typeface="Arial" pitchFamily="34" charset="-122"/>
                 <a:cs typeface="Arial" pitchFamily="34" charset="-120"/>
               </a:rPr>
-              <a:t>92 concept nodes</a:t>
+              <a:t>96 concept nodes</a:t>
             </a:r>
             <a:endParaRPr lang="en-US" sz="1800" dirty="0"/>
           </a:p>
@@ -4145,7 +4145,7 @@
                 <a:ea typeface="Arial" pitchFamily="34" charset="-122"/>
                 <a:cs typeface="Arial" pitchFamily="34" charset="-120"/>
               </a:rPr>
-              <a:t>101 typed relations</a:t>
+              <a:t>99 typed relations</a:t>
             </a:r>
             <a:endParaRPr lang="en-US" sz="1800" dirty="0"/>
           </a:p>
@@ -4202,7 +4202,7 @@
                 <a:ea typeface="Arial" pitchFamily="34" charset="-122"/>
                 <a:cs typeface="Arial" pitchFamily="34" charset="-120"/>
               </a:rPr>
-              <a:t>16 Madhva-distinctive callouts</a:t>
+              <a:t>20 Madhva-distinctive callouts</a:t>
             </a:r>
             <a:endParaRPr lang="en-US" sz="1800" dirty="0"/>
           </a:p>
@@ -9911,7 +9911,7 @@
                 <a:ea typeface="Arial" pitchFamily="34" charset="-122"/>
                 <a:cs typeface="Arial" pitchFamily="34" charset="-120"/>
               </a:rPr>
-              <a:t>8</a:t>
+              <a:t>12</a:t>
             </a:r>
             <a:endParaRPr lang="en-US" sz="1400" dirty="0"/>
           </a:p>

--- a/decks/Bhagavadgita_Concept_KG_en.pptx
+++ b/decks/Bhagavadgita_Concept_KG_en.pptx
@@ -2360,7 +2360,7 @@
                 <a:ea typeface="Arial" pitchFamily="34" charset="-122"/>
                 <a:cs typeface="Arial" pitchFamily="34" charset="-120"/>
               </a:rPr>
-              <a:t>96 concepts · 99 relations · 12 tiers</a:t>
+              <a:t>112 concepts · 124 relations · 12 tiers</a:t>
             </a:r>
             <a:endParaRPr lang="en-US" sz="1200" dirty="0"/>
           </a:p>
@@ -3677,7 +3677,7 @@
                 <a:ea typeface="Cambria" pitchFamily="34" charset="-122"/>
                 <a:cs typeface="Cambria" pitchFamily="34" charset="-120"/>
               </a:rPr>
-              <a:t>96</a:t>
+              <a:t>112</a:t>
             </a:r>
             <a:endParaRPr lang="en-US" sz="6400" dirty="0"/>
           </a:p>
@@ -3833,7 +3833,7 @@
                 <a:ea typeface="Cambria" pitchFamily="34" charset="-122"/>
                 <a:cs typeface="Cambria" pitchFamily="34" charset="-120"/>
               </a:rPr>
-              <a:t>99</a:t>
+              <a:t>124</a:t>
             </a:r>
             <a:endParaRPr lang="en-US" sz="6400" dirty="0"/>
           </a:p>
@@ -4126,7 +4126,7 @@
                 <a:ea typeface="Arial" pitchFamily="34" charset="-122"/>
                 <a:cs typeface="Arial" pitchFamily="34" charset="-120"/>
               </a:rPr>
-              <a:t>96 concept nodes</a:t>
+              <a:t>112 concept nodes</a:t>
             </a:r>
             <a:endParaRPr lang="en-US" sz="1800" dirty="0"/>
           </a:p>
@@ -4145,7 +4145,7 @@
                 <a:ea typeface="Arial" pitchFamily="34" charset="-122"/>
                 <a:cs typeface="Arial" pitchFamily="34" charset="-120"/>
               </a:rPr>
-              <a:t>99 typed relations</a:t>
+              <a:t>124 typed relations</a:t>
             </a:r>
             <a:endParaRPr lang="en-US" sz="1800" dirty="0"/>
           </a:p>
@@ -4202,7 +4202,7 @@
                 <a:ea typeface="Arial" pitchFamily="34" charset="-122"/>
                 <a:cs typeface="Arial" pitchFamily="34" charset="-120"/>
               </a:rPr>
-              <a:t>20 Madhva-distinctive callouts</a:t>
+              <a:t>22 Madhva-distinctive callouts</a:t>
             </a:r>
             <a:endParaRPr lang="en-US" sz="1800" dirty="0"/>
           </a:p>
@@ -8984,7 +8984,7 @@
                 <a:ea typeface="Arial" pitchFamily="34" charset="-122"/>
                 <a:cs typeface="Arial" pitchFamily="34" charset="-120"/>
               </a:rPr>
-              <a:t>8</a:t>
+              <a:t>10</a:t>
             </a:r>
             <a:endParaRPr lang="en-US" sz="1400" dirty="0"/>
           </a:p>
@@ -9293,7 +9293,7 @@
                 <a:ea typeface="Arial" pitchFamily="34" charset="-122"/>
                 <a:cs typeface="Arial" pitchFamily="34" charset="-120"/>
               </a:rPr>
-              <a:t>8</a:t>
+              <a:t>12</a:t>
             </a:r>
             <a:endParaRPr lang="en-US" sz="1400" dirty="0"/>
           </a:p>
@@ -9499,7 +9499,7 @@
                 <a:ea typeface="Arial" pitchFamily="34" charset="-122"/>
                 <a:cs typeface="Arial" pitchFamily="34" charset="-120"/>
               </a:rPr>
-              <a:t>9</a:t>
+              <a:t>18</a:t>
             </a:r>
             <a:endParaRPr lang="en-US" sz="1400" dirty="0"/>
           </a:p>
@@ -9705,7 +9705,7 @@
                 <a:ea typeface="Arial" pitchFamily="34" charset="-122"/>
                 <a:cs typeface="Arial" pitchFamily="34" charset="-120"/>
               </a:rPr>
-              <a:t>8</a:t>
+              <a:t>9</a:t>
             </a:r>
             <a:endParaRPr lang="en-US" sz="1400" dirty="0"/>
           </a:p>

--- a/decks/Bhagavadgita_Concept_KG_en.pptx
+++ b/decks/Bhagavadgita_Concept_KG_en.pptx
@@ -3385,7 +3385,7 @@
                 <a:ea typeface="Cormorant Garamond" pitchFamily="34" charset="-122"/>
                 <a:cs typeface="Cormorant Garamond" pitchFamily="34" charset="-120"/>
               </a:rPr>
-              <a:t>Antaḥkaraṇa</a:t>
+              <a:t>Antaá¸¥karaá¹‡a</a:t>
             </a:r>
             <a:endParaRPr lang="en-US" sz="3000" dirty="0"/>
           </a:p>
@@ -3516,7 +3516,7 @@
                 <a:ea typeface="Cormorant Garamond" pitchFamily="34" charset="-122"/>
                 <a:cs typeface="Cormorant Garamond" pitchFamily="34" charset="-120"/>
               </a:rPr>
-              <a:t>Indweller — Hari within</a:t>
+              <a:t>Indweller â€” Hari within</a:t>
             </a:r>
             <a:endParaRPr lang="en-US" sz="1300" dirty="0"/>
           </a:p>
@@ -3597,7 +3597,7 @@
                 <a:ea typeface="Cormorant Garamond" pitchFamily="34" charset="-122"/>
                 <a:cs typeface="Cormorant Garamond" pitchFamily="34" charset="-120"/>
               </a:rPr>
-              <a:t>'īśvaraḥ sarva-bhūtānāṃ hṛd-deśe tiṣṭhati' — the Lord stands in the heart of every being, directing them.</a:t>
+              <a:t>'Ä«Å›varaá¸¥ sarva-bhÅ«tÄnÄá¹ƒ há¹›d-deÅ›e tiá¹£á¹­hati' â€” the Lord stands in the heart of every being, directing them.</a:t>
             </a:r>
             <a:endParaRPr lang="en-US" sz="1050" dirty="0"/>
           </a:p>
@@ -3725,7 +3725,7 @@
                 <a:ea typeface="Cormorant Garamond" pitchFamily="34" charset="-122"/>
                 <a:cs typeface="Cormorant Garamond" pitchFamily="34" charset="-120"/>
               </a:rPr>
-              <a:t>BG 6.34–35 · 3.6–7</a:t>
+              <a:t>BG 6.34â€“35 Â· 3.6â€“7</a:t>
             </a:r>
             <a:endParaRPr lang="en-US" sz="950" dirty="0"/>
           </a:p>
@@ -3767,7 +3767,7 @@
                 <a:ea typeface="Cormorant Garamond" pitchFamily="34" charset="-122"/>
                 <a:cs typeface="Cormorant Garamond" pitchFamily="34" charset="-120"/>
               </a:rPr>
-              <a:t>The eleventh indriya. Restless, turbulent, hard to subdue — but Krishna affirms it is conquerable by abhyāsa and vairāgya.</a:t>
+              <a:t>The eleventh indriya. Restless, turbulent, hard to subdue â€” but Krishna affirms it is conquerable by abhyÄsa and vairÄgya.</a:t>
             </a:r>
             <a:endParaRPr lang="en-US" sz="1050" dirty="0"/>
           </a:p>
@@ -3895,7 +3895,7 @@
                 <a:ea typeface="Cormorant Garamond" pitchFamily="34" charset="-122"/>
                 <a:cs typeface="Cormorant Garamond" pitchFamily="34" charset="-120"/>
               </a:rPr>
-              <a:t>BG 18.30–32</a:t>
+              <a:t>BG 18.30â€“32</a:t>
             </a:r>
             <a:endParaRPr lang="en-US" sz="950" dirty="0"/>
           </a:p>
@@ -3937,7 +3937,7 @@
                 <a:ea typeface="Cormorant Garamond" pitchFamily="34" charset="-122"/>
                 <a:cs typeface="Cormorant Garamond" pitchFamily="34" charset="-120"/>
               </a:rPr>
-              <a:t>That faculty which discriminates duty from non-duty, what to do from what not to do. Sāttvika buddhi knows pravṛtti and nivṛtti.</a:t>
+              <a:t>That faculty which discriminates duty from non-duty, what to do from what not to do. SÄttvika buddhi knows pravá¹›tti and nivá¹›tti.</a:t>
             </a:r>
             <a:endParaRPr lang="en-US" sz="1050" dirty="0"/>
           </a:p>
@@ -4065,7 +4065,7 @@
                 <a:ea typeface="Cormorant Garamond" pitchFamily="34" charset="-122"/>
                 <a:cs typeface="Cormorant Garamond" pitchFamily="34" charset="-120"/>
               </a:rPr>
-              <a:t>BG 3.27 · 7.4</a:t>
+              <a:t>BG 3.27 Â· 7.4</a:t>
             </a:r>
             <a:endParaRPr lang="en-US" sz="950" dirty="0"/>
           </a:p>
@@ -4107,7 +4107,7 @@
                 <a:ea typeface="Cormorant Garamond" pitchFamily="34" charset="-122"/>
                 <a:cs typeface="Cormorant Garamond" pitchFamily="34" charset="-120"/>
               </a:rPr>
-              <a:t>The sense of being the doer. 'kartāham iti manyate' — when the puruṣa is bewildered by ahaṅkāra he thinks himself the agent.</a:t>
+              <a:t>The sense of being the doer. 'kartÄham iti manyate' â€” when the puruá¹£a is bewildered by ahaá¹…kÄra he thinks himself the agent.</a:t>
             </a:r>
             <a:endParaRPr lang="en-US" sz="1050" dirty="0"/>
           </a:p>
@@ -4387,7 +4387,7 @@
                 <a:ea typeface="Cormorant Garamond" pitchFamily="34" charset="-122"/>
                 <a:cs typeface="Cormorant Garamond" pitchFamily="34" charset="-120"/>
               </a:rPr>
-              <a:t>BG 3.35 · 18.47</a:t>
+              <a:t>BG 3.35 Â· 18.47</a:t>
             </a:r>
             <a:endParaRPr lang="en-US" sz="950" dirty="0"/>
           </a:p>
@@ -4429,7 +4429,7 @@
                 <a:ea typeface="Cormorant Garamond" pitchFamily="34" charset="-122"/>
                 <a:cs typeface="Cormorant Garamond" pitchFamily="34" charset="-120"/>
               </a:rPr>
-              <a:t>'better one's own dharma poorly done than another's well done' — performing the duty arising from one's svabhāva.</a:t>
+              <a:t>'better one's own dharma poorly done than another's well done' â€” performing the duty arising from one's svabhÄva.</a:t>
             </a:r>
             <a:endParaRPr lang="en-US" sz="1050" dirty="0"/>
           </a:p>
@@ -4557,7 +4557,7 @@
                 <a:ea typeface="Cormorant Garamond" pitchFamily="34" charset="-122"/>
                 <a:cs typeface="Cormorant Garamond" pitchFamily="34" charset="-120"/>
               </a:rPr>
-              <a:t>BG 4.13 · 18.41–44</a:t>
+              <a:t>BG 4.13 Â· 18.41â€“44</a:t>
             </a:r>
             <a:endParaRPr lang="en-US" sz="950" dirty="0"/>
           </a:p>
@@ -4599,7 +4599,7 @@
                 <a:ea typeface="Cormorant Garamond" pitchFamily="34" charset="-122"/>
                 <a:cs typeface="Cormorant Garamond" pitchFamily="34" charset="-120"/>
               </a:rPr>
-              <a:t>Brāhmaṇa, kṣatriya, vaiśya, śūdra — duties arising from guṇa-karma-vibhāga. Madhva: rooted in eternal sva-rūpa-yogyatā.</a:t>
+              <a:t>BrÄhmaá¹‡a, ká¹£atriya, vaiÅ›ya, Å›Å«dra â€” duties arising from guá¹‡a-karma-vibhÄga. Madhva: rooted in eternal sva-rÅ«pa-yogyatÄ.</a:t>
             </a:r>
             <a:endParaRPr lang="en-US" sz="1050" dirty="0"/>
           </a:p>
@@ -4727,7 +4727,7 @@
                 <a:ea typeface="Cormorant Garamond" pitchFamily="34" charset="-122"/>
                 <a:cs typeface="Cormorant Garamond" pitchFamily="34" charset="-120"/>
               </a:rPr>
-              <a:t>BG 2.47 · 4.20</a:t>
+              <a:t>BG 2.47 Â· 4.20</a:t>
             </a:r>
             <a:endParaRPr lang="en-US" sz="950" dirty="0"/>
           </a:p>
@@ -4897,7 +4897,7 @@
                 <a:ea typeface="Cormorant Garamond" pitchFamily="34" charset="-122"/>
                 <a:cs typeface="Cormorant Garamond" pitchFamily="34" charset="-120"/>
               </a:rPr>
-              <a:t>BG 2.55–72</a:t>
+              <a:t>BG 2.55â€“72</a:t>
             </a:r>
             <a:endParaRPr lang="en-US" sz="950" dirty="0"/>
           </a:p>
@@ -5049,7 +5049,7 @@
                 <a:ea typeface="Cormorant Garamond" pitchFamily="34" charset="-122"/>
                 <a:cs typeface="Cormorant Garamond" pitchFamily="34" charset="-120"/>
               </a:rPr>
-              <a:t>Doṣa</a:t>
+              <a:t>Doá¹£a</a:t>
             </a:r>
             <a:endParaRPr lang="en-US" sz="3000" dirty="0"/>
           </a:p>
@@ -5219,7 +5219,7 @@
                 <a:ea typeface="Cormorant Garamond" pitchFamily="34" charset="-122"/>
                 <a:cs typeface="Cormorant Garamond" pitchFamily="34" charset="-120"/>
               </a:rPr>
-              <a:t>BG 16.4 · 16.7–20</a:t>
+              <a:t>BG 16.4 Â· 16.7â€“20</a:t>
             </a:r>
             <a:endParaRPr lang="en-US" sz="950" dirty="0"/>
           </a:p>
@@ -5261,7 +5261,7 @@
                 <a:ea typeface="Cormorant Garamond" pitchFamily="34" charset="-122"/>
                 <a:cs typeface="Cormorant Garamond" pitchFamily="34" charset="-120"/>
               </a:rPr>
-              <a:t>Hypocrisy, arrogance, conceit, anger, harshness, ignorance — the inverse of divine endowment. Leads to bondage.</a:t>
+              <a:t>Hypocrisy, arrogance, conceit, anger, harshness, ignorance â€” the inverse of divine endowment. Leads to bondage.</a:t>
             </a:r>
             <a:endParaRPr lang="en-US" sz="1050" dirty="0"/>
           </a:p>
@@ -5389,7 +5389,7 @@
                 <a:ea typeface="Cormorant Garamond" pitchFamily="34" charset="-122"/>
                 <a:cs typeface="Cormorant Garamond" pitchFamily="34" charset="-120"/>
               </a:rPr>
-              <a:t>BG 3.37–39</a:t>
+              <a:t>BG 3.37â€“39</a:t>
             </a:r>
             <a:endParaRPr lang="en-US" sz="950" dirty="0"/>
           </a:p>
@@ -5431,7 +5431,7 @@
                 <a:ea typeface="Cormorant Garamond" pitchFamily="34" charset="-122"/>
                 <a:cs typeface="Cormorant Garamond" pitchFamily="34" charset="-120"/>
               </a:rPr>
-              <a:t>'this is the enemy here, born of rajas, all-devouring, greatly sinful' — Krishna names kāma as the primary foe.</a:t>
+              <a:t>'this is the enemy here, born of rajas, all-devouring, greatly sinful' â€” Krishna names kÄma as the primary foe.</a:t>
             </a:r>
             <a:endParaRPr lang="en-US" sz="1050" dirty="0"/>
           </a:p>
@@ -5559,7 +5559,7 @@
                 <a:ea typeface="Cormorant Garamond" pitchFamily="34" charset="-122"/>
                 <a:cs typeface="Cormorant Garamond" pitchFamily="34" charset="-120"/>
               </a:rPr>
-              <a:t>BG 2.62–63 · 3.37</a:t>
+              <a:t>BG 2.62â€“63 Â· 3.37</a:t>
             </a:r>
             <a:endParaRPr lang="en-US" sz="950" dirty="0"/>
           </a:p>
@@ -5601,7 +5601,7 @@
                 <a:ea typeface="Cormorant Garamond" pitchFamily="34" charset="-122"/>
                 <a:cs typeface="Cormorant Garamond" pitchFamily="34" charset="-120"/>
               </a:rPr>
-              <a:t>From kāma-vighāta (blocked desire) arises krodha; from krodha, delusion; from delusion, loss of memory.</a:t>
+              <a:t>From kÄma-vighÄta (blocked desire) arises krodha; from krodha, delusion; from delusion, loss of memory.</a:t>
             </a:r>
             <a:endParaRPr lang="en-US" sz="1050" dirty="0"/>
           </a:p>
@@ -5771,7 +5771,7 @@
                 <a:ea typeface="Cormorant Garamond" pitchFamily="34" charset="-122"/>
                 <a:cs typeface="Cormorant Garamond" pitchFamily="34" charset="-120"/>
               </a:rPr>
-              <a:t>One of the three gates of hell, alongside kāma and krodha. To be abandoned at the threshold of the path.</a:t>
+              <a:t>One of the three gates of hell, alongside kÄma and krodha. To be abandoned at the threshold of the path.</a:t>
             </a:r>
             <a:endParaRPr lang="en-US" sz="1050" dirty="0"/>
           </a:p>
@@ -6051,7 +6051,7 @@
                 <a:ea typeface="Cormorant Garamond" pitchFamily="34" charset="-122"/>
                 <a:cs typeface="Cormorant Garamond" pitchFamily="34" charset="-120"/>
               </a:rPr>
-              <a:t>BG 5.24–26 · 18.66</a:t>
+              <a:t>BG 5.24â€“26 Â· 18.66</a:t>
             </a:r>
             <a:endParaRPr lang="en-US" sz="950" dirty="0"/>
           </a:p>
@@ -6093,7 +6093,7 @@
                 <a:ea typeface="Cormorant Garamond" pitchFamily="34" charset="-122"/>
                 <a:cs typeface="Cormorant Garamond" pitchFamily="34" charset="-120"/>
               </a:rPr>
-              <a:t>Release from saṃsāra into Hari's eternal presence. For Madhva: gradations of mokṣa (sālokya, sārṣṭi, sāmīpya, sārūpya, sāyujya).</a:t>
+              <a:t>Release from saá¹ƒsÄra into Hari's eternal presence. For Madhva: gradations of moká¹£a (sÄlokya, sÄrá¹£á¹­i, sÄmÄ«pya, sÄrÅ«pya, sÄyujya).</a:t>
             </a:r>
             <a:endParaRPr lang="en-US" sz="1050" dirty="0"/>
           </a:p>
@@ -6263,7 +6263,7 @@
                 <a:ea typeface="Cormorant Garamond" pitchFamily="34" charset="-122"/>
                 <a:cs typeface="Cormorant Garamond" pitchFamily="34" charset="-120"/>
               </a:rPr>
-              <a:t>'I will release you from all sins; do not grieve' — Krishna's guarantee at 18.66. For Madhva, the crown of the Gītā.</a:t>
+              <a:t>'I will release you from all sins; do not grieve' â€” Krishna's guarantee at 18.66. For Madhva, the crown of the GÄ«tÄ.</a:t>
             </a:r>
             <a:endParaRPr lang="en-US" sz="1050" dirty="0"/>
           </a:p>
@@ -6391,7 +6391,7 @@
                 <a:ea typeface="Cormorant Garamond" pitchFamily="34" charset="-122"/>
                 <a:cs typeface="Cormorant Garamond" pitchFamily="34" charset="-120"/>
               </a:rPr>
-              <a:t>BG 8.21 · 15.6</a:t>
+              <a:t>BG 8.21 Â· 15.6</a:t>
             </a:r>
             <a:endParaRPr lang="en-US" sz="950" dirty="0"/>
           </a:p>
@@ -6433,7 +6433,7 @@
                 <a:ea typeface="Cormorant Garamond" pitchFamily="34" charset="-122"/>
                 <a:cs typeface="Cormorant Garamond" pitchFamily="34" charset="-120"/>
               </a:rPr>
-              <a:t>First grade of mokṣa: dwelling in the same loka as Hari (Vaikuṇṭha) — but not yet in His proximity.</a:t>
+              <a:t>First grade of moká¹£a: dwelling in the same loka as Hari (Vaikuá¹‡á¹­ha) â€” but not yet in His proximity.</a:t>
             </a:r>
             <a:endParaRPr lang="en-US" sz="1050" dirty="0"/>
           </a:p>
@@ -6603,7 +6603,7 @@
                 <a:ea typeface="Cormorant Garamond" pitchFamily="34" charset="-122"/>
                 <a:cs typeface="Cormorant Garamond" pitchFamily="34" charset="-120"/>
               </a:rPr>
-              <a:t>Second grade: proximity to Hari in His own abode. Beyond sālokya, not yet sārūpya.</a:t>
+              <a:t>Second grade: proximity to Hari in His own abode. Beyond sÄlokya, not yet sÄrÅ«pya.</a:t>
             </a:r>
             <a:endParaRPr lang="en-US" sz="1050" dirty="0"/>
           </a:p>
@@ -6713,7 +6713,7 @@
                 <a:ea typeface="Cormorant Garamond" pitchFamily="34" charset="-122"/>
                 <a:cs typeface="Cormorant Garamond" pitchFamily="34" charset="-120"/>
               </a:rPr>
-              <a:t>Yajña</a:t>
+              <a:t>YajÃ±a</a:t>
             </a:r>
             <a:endParaRPr lang="en-US" sz="3000" dirty="0"/>
           </a:p>
@@ -6925,7 +6925,7 @@
                 <a:ea typeface="Cormorant Garamond" pitchFamily="34" charset="-122"/>
                 <a:cs typeface="Cormorant Garamond" pitchFamily="34" charset="-120"/>
               </a:rPr>
-              <a:t>Offering material wealth — first of Krishna's catalogue of yajñas at BG 4.28.</a:t>
+              <a:t>Offering material wealth â€” first of Krishna's catalogue of yajÃ±as at BG 4.28.</a:t>
             </a:r>
             <a:endParaRPr lang="en-US" sz="1050" dirty="0"/>
           </a:p>
@@ -7095,7 +7095,7 @@
                 <a:ea typeface="Cormorant Garamond" pitchFamily="34" charset="-122"/>
                 <a:cs typeface="Cormorant Garamond" pitchFamily="34" charset="-120"/>
               </a:rPr>
-              <a:t>Offering one's tapas — bodily, vocal, mental austerities — as worship.</a:t>
+              <a:t>Offering one's tapas â€” bodily, vocal, mental austerities â€” as worship.</a:t>
             </a:r>
             <a:endParaRPr lang="en-US" sz="1050" dirty="0"/>
           </a:p>
@@ -7223,7 +7223,7 @@
                 <a:ea typeface="Cormorant Garamond" pitchFamily="34" charset="-122"/>
                 <a:cs typeface="Cormorant Garamond" pitchFamily="34" charset="-120"/>
               </a:rPr>
-              <a:t>BG 4.28–30</a:t>
+              <a:t>BG 4.28â€“30</a:t>
             </a:r>
             <a:endParaRPr lang="en-US" sz="950" dirty="0"/>
           </a:p>
@@ -7265,7 +7265,7 @@
                 <a:ea typeface="Cormorant Garamond" pitchFamily="34" charset="-122"/>
                 <a:cs typeface="Cormorant Garamond" pitchFamily="34" charset="-120"/>
               </a:rPr>
-              <a:t>Offering one's yogic discipline — prāṇa-apāna control, eightfold yoga — as worship of Hari.</a:t>
+              <a:t>Offering one's yogic discipline â€” prÄá¹‡a-apÄna control, eightfold yoga â€” as worship of Hari.</a:t>
             </a:r>
             <a:endParaRPr lang="en-US" sz="1050" dirty="0"/>
           </a:p>
@@ -7435,7 +7435,7 @@
                 <a:ea typeface="Cormorant Garamond" pitchFamily="34" charset="-122"/>
                 <a:cs typeface="Cormorant Garamond" pitchFamily="34" charset="-120"/>
               </a:rPr>
-              <a:t>Recitation of scripture together with the knowledge it discloses — the highest verbal yajña.</a:t>
+              <a:t>Recitation of scripture together with the knowledge it discloses â€” the highest verbal yajÃ±a.</a:t>
             </a:r>
             <a:endParaRPr lang="en-US" sz="1050" dirty="0"/>
           </a:p>
@@ -7545,7 +7545,7 @@
                 <a:ea typeface="Cormorant Garamond" pitchFamily="34" charset="-122"/>
                 <a:cs typeface="Cormorant Garamond" pitchFamily="34" charset="-120"/>
               </a:rPr>
-              <a:t>Pratīka</a:t>
+              <a:t>PratÄ«ka</a:t>
             </a:r>
             <a:endParaRPr lang="en-US" sz="3000" dirty="0"/>
           </a:p>
@@ -7715,7 +7715,7 @@
                 <a:ea typeface="Cormorant Garamond" pitchFamily="34" charset="-122"/>
                 <a:cs typeface="Cormorant Garamond" pitchFamily="34" charset="-120"/>
               </a:rPr>
-              <a:t>BG 15.1–3</a:t>
+              <a:t>BG 15.1â€“3</a:t>
             </a:r>
             <a:endParaRPr lang="en-US" sz="950" dirty="0"/>
           </a:p>
@@ -7757,7 +7757,7 @@
                 <a:ea typeface="Cormorant Garamond" pitchFamily="34" charset="-122"/>
                 <a:cs typeface="Cormorant Garamond" pitchFamily="34" charset="-120"/>
               </a:rPr>
-              <a:t>Roots above (Hari), branches below (the worlds); fed by the guṇas, sprouting sense-objects. Cut it with the axe of non-attachment.</a:t>
+              <a:t>Roots above (Hari), branches below (the worlds); fed by the guá¹‡as, sprouting sense-objects. Cut it with the axe of non-attachment.</a:t>
             </a:r>
             <a:endParaRPr lang="en-US" sz="1050" dirty="0"/>
           </a:p>
@@ -7885,7 +7885,7 @@
                 <a:ea typeface="Cormorant Garamond" pitchFamily="34" charset="-122"/>
                 <a:cs typeface="Cormorant Garamond" pitchFamily="34" charset="-120"/>
               </a:rPr>
-              <a:t>BG 1.21–25 · 18.78</a:t>
+              <a:t>BG 1.21â€“25 Â· 18.78</a:t>
             </a:r>
             <a:endParaRPr lang="en-US" sz="950" dirty="0"/>
           </a:p>
@@ -7927,7 +7927,7 @@
                 <a:ea typeface="Cormorant Garamond" pitchFamily="34" charset="-122"/>
                 <a:cs typeface="Cormorant Garamond" pitchFamily="34" charset="-120"/>
               </a:rPr>
-              <a:t>Implied throughout Ch 1–2: Krishna the sārathi (charioteer), Arjuna the rathin (warrior on the chariot). Echo of Kaṭha Up.</a:t>
+              <a:t>Implied throughout Ch 1â€“2: Krishna the sÄrathi (charioteer), Arjuna the rathin (warrior on the chariot). Echo of Kaá¹­ha Up.</a:t>
             </a:r>
             <a:endParaRPr lang="en-US" sz="1050" dirty="0"/>
           </a:p>
@@ -8055,7 +8055,7 @@
                 <a:ea typeface="Cormorant Garamond" pitchFamily="34" charset="-122"/>
                 <a:cs typeface="Cormorant Garamond" pitchFamily="34" charset="-120"/>
               </a:rPr>
-              <a:t>BG 8.13 · 17.23</a:t>
+              <a:t>BG 8.13 Â· 17.23</a:t>
             </a:r>
             <a:endParaRPr lang="en-US" sz="950" dirty="0"/>
           </a:p>
@@ -8097,7 +8097,7 @@
                 <a:ea typeface="Cormorant Garamond" pitchFamily="34" charset="-122"/>
                 <a:cs typeface="Cormorant Garamond" pitchFamily="34" charset="-120"/>
               </a:rPr>
-              <a:t>'oṃ ity ekākṣaraṃ brahma' — uttering Om at the moment of death, remembering Hari, one attains the supreme.</a:t>
+              <a:t>'oá¹ƒ ity ekÄká¹£araá¹ƒ brahma' â€” uttering Om at the moment of death, remembering Hari, one attains the supreme.</a:t>
             </a:r>
             <a:endParaRPr lang="en-US" sz="1050" dirty="0"/>
           </a:p>
@@ -8267,7 +8267,7 @@
                 <a:ea typeface="Cormorant Garamond" pitchFamily="34" charset="-122"/>
                 <a:cs typeface="Cormorant Garamond" pitchFamily="34" charset="-120"/>
               </a:rPr>
-              <a:t>Among letters, Krishna says, 'I am A' — the source of all phonemes; among compounds, the dvandva.</a:t>
+              <a:t>Among letters, Krishna says, 'I am A' â€” the source of all phonemes; among compounds, the dvandva.</a:t>
             </a:r>
             <a:endParaRPr lang="en-US" sz="1050" dirty="0"/>
           </a:p>
@@ -9144,7 +9144,7 @@
                 <a:ea typeface="Cormorant Garamond" pitchFamily="34" charset="-122"/>
                 <a:cs typeface="Cormorant Garamond" pitchFamily="34" charset="-120"/>
               </a:rPr>
-              <a:t>Paramārtha</a:t>
+              <a:t>ParamÄrtha</a:t>
             </a:r>
             <a:endParaRPr lang="en-US" sz="800" dirty="0"/>
           </a:p>
@@ -9672,7 +9672,7 @@
                 <a:ea typeface="Cormorant Garamond" pitchFamily="34" charset="-122"/>
                 <a:cs typeface="Cormorant Garamond" pitchFamily="34" charset="-120"/>
               </a:rPr>
-              <a:t>Kṣetra-Kṣetrajña</a:t>
+              <a:t>Ká¹£etra-Ká¹£etrajÃ±a</a:t>
             </a:r>
             <a:endParaRPr lang="en-US" sz="800" dirty="0"/>
           </a:p>
@@ -9911,7 +9911,7 @@
                 <a:ea typeface="Cormorant Garamond" pitchFamily="34" charset="-122"/>
                 <a:cs typeface="Cormorant Garamond" pitchFamily="34" charset="-120"/>
               </a:rPr>
-              <a:t>Guṇa</a:t>
+              <a:t>Guá¹‡a</a:t>
             </a:r>
             <a:endParaRPr lang="en-US" sz="800" dirty="0"/>
           </a:p>
@@ -10464,7 +10464,7 @@
                 <a:ea typeface="Cormorant Garamond" pitchFamily="34" charset="-122"/>
                 <a:cs typeface="Cormorant Garamond" pitchFamily="34" charset="-120"/>
               </a:rPr>
-              <a:t>Sādhanā</a:t>
+              <a:t>SÄdhanÄ</a:t>
             </a:r>
             <a:endParaRPr lang="en-US" sz="800" dirty="0"/>
           </a:p>
@@ -10753,7 +10753,7 @@
                 <a:ea typeface="Cormorant Garamond" pitchFamily="34" charset="-122"/>
                 <a:cs typeface="Cormorant Garamond" pitchFamily="34" charset="-120"/>
               </a:rPr>
-              <a:t>Antaḥkaraṇa</a:t>
+              <a:t>Antaá¸¥karaá¹‡a</a:t>
             </a:r>
             <a:endParaRPr lang="en-US" sz="800" dirty="0"/>
           </a:p>
@@ -11206,7 +11206,7 @@
                 <a:ea typeface="Cormorant Garamond" pitchFamily="34" charset="-122"/>
                 <a:cs typeface="Cormorant Garamond" pitchFamily="34" charset="-120"/>
               </a:rPr>
-              <a:t>Doṣa</a:t>
+              <a:t>Doá¹£a</a:t>
             </a:r>
             <a:endParaRPr lang="en-US" sz="800" dirty="0"/>
           </a:p>
@@ -11734,7 +11734,7 @@
                 <a:ea typeface="Cormorant Garamond" pitchFamily="34" charset="-122"/>
                 <a:cs typeface="Cormorant Garamond" pitchFamily="34" charset="-120"/>
               </a:rPr>
-              <a:t>Yajña</a:t>
+              <a:t>YajÃ±a</a:t>
             </a:r>
             <a:endParaRPr lang="en-US" sz="800" dirty="0"/>
           </a:p>
@@ -11923,7 +11923,7 @@
                 <a:ea typeface="Cormorant Garamond" pitchFamily="34" charset="-122"/>
                 <a:cs typeface="Cormorant Garamond" pitchFamily="34" charset="-120"/>
               </a:rPr>
-              <a:t>Pratīka</a:t>
+              <a:t>PratÄ«ka</a:t>
             </a:r>
             <a:endParaRPr lang="en-US" sz="800" dirty="0"/>
           </a:p>
@@ -12225,7 +12225,7 @@
                 <a:ea typeface="Cormorant Garamond" pitchFamily="34" charset="-122"/>
                 <a:cs typeface="Cormorant Garamond" pitchFamily="34" charset="-120"/>
               </a:rPr>
-              <a:t>The axiom anchoring tāratamya: Hari is highest, no one his equal or superior. Every other being is strictly subordinate.</a:t>
+              <a:t>The axiom anchoring tÄratamya: Hari is highest, no one his equal or superior. Every other being is strictly subordinate.</a:t>
             </a:r>
             <a:endParaRPr lang="en-US" sz="1300" dirty="0"/>
           </a:p>
@@ -12267,7 +12267,7 @@
                 <a:ea typeface="Cormorant Garamond" pitchFamily="34" charset="-122"/>
                 <a:cs typeface="Cormorant Garamond" pitchFamily="34" charset="-120"/>
               </a:rPr>
-              <a:t>Foundational Madhva siddhānta — pañca-bheda starts here.</a:t>
+              <a:t>Foundational Madhva siddhÄnta â€” paÃ±ca-bheda starts here.</a:t>
             </a:r>
             <a:endParaRPr lang="en-US" sz="1300" dirty="0"/>
           </a:p>
@@ -12437,7 +12437,7 @@
                 <a:ea typeface="Cormorant Garamond" pitchFamily="34" charset="-122"/>
                 <a:cs typeface="Cormorant Garamond" pitchFamily="34" charset="-120"/>
               </a:rPr>
-              <a:t>mattaḥ parataraṃ nānyat kiñcid asti dhanañjaya |</a:t>
+              <a:t>mattaá¸¥ parataraá¹ƒ nÄnyat kiÃ±cid asti dhanaÃ±jaya |</a:t>
             </a:r>
             <a:endParaRPr lang="en-US" sz="1200" dirty="0"/>
           </a:p>
@@ -12476,7 +12476,7 @@
                 <a:ea typeface="Cormorant Garamond" pitchFamily="34" charset="-122"/>
                 <a:cs typeface="Cormorant Garamond" pitchFamily="34" charset="-120"/>
               </a:rPr>
-              <a:t>BG 7.7 · 11.43 · 18.65</a:t>
+              <a:t>BG 7.7 Â· 11.43 Â· 18.65</a:t>
             </a:r>
             <a:endParaRPr lang="en-US" sz="1000" dirty="0"/>
           </a:p>
@@ -12628,7 +12628,7 @@
                 <a:ea typeface="Cormorant Garamond" pitchFamily="34" charset="-122"/>
                 <a:cs typeface="Cormorant Garamond" pitchFamily="34" charset="-120"/>
               </a:rPr>
-              <a:t>Hari-jīva, Hari-jaḍa, jīva-jaḍa, jīva-jīva, jaḍa-jaḍa — five eternal differences that Madhva siddhānta defends as ontologically real.</a:t>
+              <a:t>Hari-jÄ«va, Hari-jaá¸a, jÄ«va-jaá¸a, jÄ«va-jÄ«va, jaá¸a-jaá¸a â€” five eternal differences that Madhva siddhÄnta defends as ontologically real.</a:t>
             </a:r>
             <a:endParaRPr lang="en-US" sz="1300" dirty="0"/>
           </a:p>
@@ -12670,7 +12670,7 @@
                 <a:ea typeface="Cormorant Garamond" pitchFamily="34" charset="-122"/>
                 <a:cs typeface="Cormorant Garamond" pitchFamily="34" charset="-120"/>
               </a:rPr>
-              <a:t>Madhva-defining. Each bheda is anchored in BG (jīva 15.7, jīva-jīva-bheda implicit in svabhāva 18.41ff).</a:t>
+              <a:t>Madhva-defining. Each bheda is anchored in BG (jÄ«va 15.7, jÄ«va-jÄ«va-bheda implicit in svabhÄva 18.41ff).</a:t>
             </a:r>
             <a:endParaRPr lang="en-US" sz="1300" dirty="0"/>
           </a:p>
@@ -12840,7 +12840,7 @@
                 <a:ea typeface="Cormorant Garamond" pitchFamily="34" charset="-122"/>
                 <a:cs typeface="Cormorant Garamond" pitchFamily="34" charset="-120"/>
               </a:rPr>
-              <a:t>mamaivāṃśo jīva-loke jīva-bhūtaḥ sanātanaḥ |</a:t>
+              <a:t>mamaivÄá¹ƒÅ›o jÄ«va-loke jÄ«va-bhÅ«taá¸¥ sanÄtanaá¸¥ |</a:t>
             </a:r>
             <a:endParaRPr lang="en-US" sz="1200" dirty="0"/>
           </a:p>
@@ -12879,7 +12879,7 @@
                 <a:ea typeface="Cormorant Garamond" pitchFamily="34" charset="-122"/>
                 <a:cs typeface="Cormorant Garamond" pitchFamily="34" charset="-120"/>
               </a:rPr>
-              <a:t>BG 7.4–5 · 15.7 · 15.16–18</a:t>
+              <a:t>BG 7.4â€“5 Â· 15.7 Â· 15.16â€“18</a:t>
             </a:r>
             <a:endParaRPr lang="en-US" sz="1000" dirty="0"/>
           </a:p>
@@ -13183,7 +13183,7 @@
                 <a:ea typeface="Cormorant Garamond" pitchFamily="34" charset="-122"/>
                 <a:cs typeface="Cormorant Garamond" pitchFamily="34" charset="-120"/>
               </a:rPr>
-              <a:t>The strict hierarchy of all reality under Hari — every soul has a definite, irreversible rank. The architectural principle of Madhva metaphysics.</a:t>
+              <a:t>The strict hierarchy of all reality under Hari â€” every soul has a definite, irreversible rank. The architectural principle of Madhva metaphysics.</a:t>
             </a:r>
             <a:endParaRPr lang="en-US" sz="1300" dirty="0"/>
           </a:p>
@@ -13225,7 +13225,7 @@
                 <a:ea typeface="Cormorant Garamond" pitchFamily="34" charset="-122"/>
                 <a:cs typeface="Cormorant Garamond" pitchFamily="34" charset="-120"/>
               </a:rPr>
-              <a:t>Distinctively Madhva. Underwrites pañca-bheda and the gradations of mukti.</a:t>
+              <a:t>Distinctively Madhva. Underwrites paÃ±ca-bheda and the gradations of mukti.</a:t>
             </a:r>
             <a:endParaRPr lang="en-US" sz="1300" dirty="0"/>
           </a:p>
@@ -13395,7 +13395,7 @@
                 <a:ea typeface="Cormorant Garamond" pitchFamily="34" charset="-122"/>
                 <a:cs typeface="Cormorant Garamond" pitchFamily="34" charset="-120"/>
               </a:rPr>
-              <a:t>mattaḥ parataraṃ nānyat kiñcid asti dhanañjaya |</a:t>
+              <a:t>mattaá¸¥ parataraá¹ƒ nÄnyat kiÃ±cid asti dhanaÃ±jaya |</a:t>
             </a:r>
             <a:endParaRPr lang="en-US" sz="1200" dirty="0"/>
           </a:p>
@@ -13415,7 +13415,7 @@
                 <a:ea typeface="Cormorant Garamond" pitchFamily="34" charset="-122"/>
                 <a:cs typeface="Cormorant Garamond" pitchFamily="34" charset="-120"/>
               </a:rPr>
-              <a:t>mayi sarvam idaṃ protaṃ sūtre maṇi-gaṇā iva ||</a:t>
+              <a:t>mayi sarvam idaá¹ƒ protaá¹ƒ sÅ«tre maá¹‡i-gaá¹‡Ä iva ||</a:t>
             </a:r>
             <a:endParaRPr lang="en-US" sz="1200" dirty="0"/>
           </a:p>
@@ -13454,7 +13454,7 @@
                 <a:ea typeface="Cormorant Garamond" pitchFamily="34" charset="-122"/>
                 <a:cs typeface="Cormorant Garamond" pitchFamily="34" charset="-120"/>
               </a:rPr>
-              <a:t>BG 7.7 · 15.16–18</a:t>
+              <a:t>BG 7.7 Â· 15.16â€“18</a:t>
             </a:r>
             <a:endParaRPr lang="en-US" sz="1000" dirty="0"/>
           </a:p>
@@ -13606,7 +13606,7 @@
                 <a:ea typeface="Cormorant Garamond" pitchFamily="34" charset="-122"/>
                 <a:cs typeface="Cormorant Garamond" pitchFamily="34" charset="-120"/>
               </a:rPr>
-              <a:t>'I will release you from all sins; do not grieve' — Krishna's guarantee at 18.66. For Madhva, the crown of the Gītā.</a:t>
+              <a:t>'I will release you from all sins; do not grieve' â€” Krishna's guarantee at 18.66. For Madhva, the crown of the GÄ«tÄ.</a:t>
             </a:r>
             <a:endParaRPr lang="en-US" sz="1300" dirty="0"/>
           </a:p>
@@ -13648,7 +13648,7 @@
                 <a:ea typeface="Cormorant Garamond" pitchFamily="34" charset="-122"/>
                 <a:cs typeface="Cormorant Garamond" pitchFamily="34" charset="-120"/>
               </a:rPr>
-              <a:t>The carama-śloka — Madhva's direct mokṣa-upadeśa.</a:t>
+              <a:t>The carama-Å›loka â€” Madhva's direct moká¹£a-upadeÅ›a.</a:t>
             </a:r>
             <a:endParaRPr lang="en-US" sz="1300" dirty="0"/>
           </a:p>
@@ -13818,7 +13818,7 @@
                 <a:ea typeface="Cormorant Garamond" pitchFamily="34" charset="-122"/>
                 <a:cs typeface="Cormorant Garamond" pitchFamily="34" charset="-120"/>
               </a:rPr>
-              <a:t>sarva-dharmān parityajya mām ekaṃ śaraṇaṃ vraja |</a:t>
+              <a:t>sarva-dharmÄn parityajya mÄm ekaá¹ƒ Å›araá¹‡aá¹ƒ vraja |</a:t>
             </a:r>
             <a:endParaRPr lang="en-US" sz="1200" dirty="0"/>
           </a:p>
@@ -13838,7 +13838,7 @@
                 <a:ea typeface="Cormorant Garamond" pitchFamily="34" charset="-122"/>
                 <a:cs typeface="Cormorant Garamond" pitchFamily="34" charset="-120"/>
               </a:rPr>
-              <a:t>ahaṃ tvā sarva-pāpebhyo mokṣayiṣyāmi mā śucaḥ ||</a:t>
+              <a:t>ahaá¹ƒ tvÄ sarva-pÄpebhyo moká¹£ayiá¹£yÄmi mÄ Å›ucaá¸¥ ||</a:t>
             </a:r>
             <a:endParaRPr lang="en-US" sz="1200" dirty="0"/>
           </a:p>
@@ -14029,7 +14029,7 @@
                 <a:ea typeface="Cormorant Garamond" pitchFamily="34" charset="-122"/>
                 <a:cs typeface="Cormorant Garamond" pitchFamily="34" charset="-120"/>
               </a:rPr>
-              <a:t>An eternal aṃśa of Hari (BG 15.7) — real, distinct, plural, never merged with Brahman. Bound by avidyā until released.</a:t>
+              <a:t>An eternal aá¹ƒÅ›a of Hari (BG 15.7) â€” real, distinct, plural, never merged with Brahman. Bound by avidyÄ until released.</a:t>
             </a:r>
             <a:endParaRPr lang="en-US" sz="1300" dirty="0"/>
           </a:p>
@@ -14071,7 +14071,7 @@
                 <a:ea typeface="Cormorant Garamond" pitchFamily="34" charset="-122"/>
                 <a:cs typeface="Cormorant Garamond" pitchFamily="34" charset="-120"/>
               </a:rPr>
-              <a:t>Jīva-bheda is real (pañca-bheda #1). Plurality of jīvas is eternal.</a:t>
+              <a:t>JÄ«va-bheda is real (paÃ±ca-bheda #1). Plurality of jÄ«vas is eternal.</a:t>
             </a:r>
             <a:endParaRPr lang="en-US" sz="1300" dirty="0"/>
           </a:p>
@@ -14241,7 +14241,7 @@
                 <a:ea typeface="Cormorant Garamond" pitchFamily="34" charset="-122"/>
                 <a:cs typeface="Cormorant Garamond" pitchFamily="34" charset="-120"/>
               </a:rPr>
-              <a:t>mamaivāṃśo jīva-loke jīva-bhūtaḥ sanātanaḥ |</a:t>
+              <a:t>mamaivÄá¹ƒÅ›o jÄ«va-loke jÄ«va-bhÅ«taá¸¥ sanÄtanaá¸¥ |</a:t>
             </a:r>
             <a:endParaRPr lang="en-US" sz="1200" dirty="0"/>
           </a:p>
@@ -14261,7 +14261,7 @@
                 <a:ea typeface="Cormorant Garamond" pitchFamily="34" charset="-122"/>
                 <a:cs typeface="Cormorant Garamond" pitchFamily="34" charset="-120"/>
               </a:rPr>
-              <a:t>manaḥ-ṣaṣṭhānīndriyāṇi prakṛti-sthāni karṣati ||</a:t>
+              <a:t>manaá¸¥-á¹£aá¹£á¹­hÄnÄ«ndriyÄá¹‡i praká¹›ti-sthÄni kará¹£ati ||</a:t>
             </a:r>
             <a:endParaRPr lang="en-US" sz="1200" dirty="0"/>
           </a:p>
@@ -15026,7 +15026,7 @@
                 <a:ea typeface="Cormorant Garamond" pitchFamily="34" charset="-122"/>
                 <a:cs typeface="Cormorant Garamond" pitchFamily="34" charset="-120"/>
               </a:rPr>
-              <a:t>124</a:t>
+              <a:t>241</a:t>
             </a:r>
             <a:endParaRPr lang="en-US" sz="6000" dirty="0"/>
           </a:p>
@@ -15232,7 +15232,7 @@
                 <a:ea typeface="Cormorant Garamond" pitchFamily="34" charset="-122"/>
                 <a:cs typeface="Cormorant Garamond" pitchFamily="34" charset="-120"/>
               </a:rPr>
-              <a:t>112</a:t>
+              <a:t>124</a:t>
             </a:r>
             <a:endParaRPr lang="en-US" sz="6000" dirty="0"/>
           </a:p>
@@ -15700,7 +15700,7 @@
                 <a:ea typeface="Cormorant Garamond" pitchFamily="34" charset="-122"/>
                 <a:cs typeface="Cormorant Garamond" pitchFamily="34" charset="-120"/>
               </a:rPr>
-              <a:t>Paramārtha</a:t>
+              <a:t>ParamÄrtha</a:t>
             </a:r>
             <a:endParaRPr lang="en-US" sz="1300" dirty="0"/>
           </a:p>
@@ -15739,7 +15739,7 @@
                 <a:ea typeface="Cormorant Garamond" pitchFamily="34" charset="-122"/>
                 <a:cs typeface="Cormorant Garamond" pitchFamily="34" charset="-120"/>
               </a:rPr>
-              <a:t>Ultimate reality — Hari, the sarvottama</a:t>
+              <a:t>Ultimate reality â€” Hari, the sarvottama</a:t>
             </a:r>
             <a:endParaRPr lang="en-US" sz="1100" dirty="0"/>
           </a:p>
@@ -15842,7 +15842,7 @@
                 <a:ea typeface="Cormorant Garamond" pitchFamily="34" charset="-122"/>
                 <a:cs typeface="Cormorant Garamond" pitchFamily="34" charset="-120"/>
               </a:rPr>
-              <a:t>Metaphysical categories — jīva, prakṛti, kāla</a:t>
+              <a:t>Metaphysical categories â€” jÄ«va, praká¹›ti, kÄla</a:t>
             </a:r>
             <a:endParaRPr lang="en-US" sz="1100" dirty="0"/>
           </a:p>
@@ -15906,7 +15906,7 @@
                 <a:ea typeface="Cormorant Garamond" pitchFamily="34" charset="-122"/>
                 <a:cs typeface="Cormorant Garamond" pitchFamily="34" charset="-120"/>
               </a:rPr>
-              <a:t>Kṣetra-Kṣetrajña</a:t>
+              <a:t>Ká¹£etra-Ká¹£etrajÃ±a</a:t>
             </a:r>
             <a:endParaRPr lang="en-US" sz="1300" dirty="0"/>
           </a:p>
@@ -15945,7 +15945,7 @@
                 <a:ea typeface="Cormorant Garamond" pitchFamily="34" charset="-122"/>
                 <a:cs typeface="Cormorant Garamond" pitchFamily="34" charset="-120"/>
               </a:rPr>
-              <a:t>Field &amp; field-knower — body, knower, 24 elements (Ch 13)</a:t>
+              <a:t>Field &amp; field-knower â€” body, knower, 24 elements (Ch 13)</a:t>
             </a:r>
             <a:endParaRPr lang="en-US" sz="1100" dirty="0"/>
           </a:p>
@@ -16009,7 +16009,7 @@
                 <a:ea typeface="Cormorant Garamond" pitchFamily="34" charset="-122"/>
                 <a:cs typeface="Cormorant Garamond" pitchFamily="34" charset="-120"/>
               </a:rPr>
-              <a:t>Guṇa</a:t>
+              <a:t>Guá¹‡a</a:t>
             </a:r>
             <a:endParaRPr lang="en-US" sz="1300" dirty="0"/>
           </a:p>
@@ -16048,7 +16048,7 @@
                 <a:ea typeface="Cormorant Garamond" pitchFamily="34" charset="-122"/>
                 <a:cs typeface="Cormorant Garamond" pitchFamily="34" charset="-120"/>
               </a:rPr>
-              <a:t>The three modes of prakṛti — sattva, rajas, tamas</a:t>
+              <a:t>The three modes of praká¹›ti â€” sattva, rajas, tamas</a:t>
             </a:r>
             <a:endParaRPr lang="en-US" sz="1100" dirty="0"/>
           </a:p>
@@ -16151,7 +16151,7 @@
                 <a:ea typeface="Cormorant Garamond" pitchFamily="34" charset="-122"/>
                 <a:cs typeface="Cormorant Garamond" pitchFamily="34" charset="-120"/>
               </a:rPr>
-              <a:t>Paths — karma, jñāna, bhakti, dhyāna, sannyāsa</a:t>
+              <a:t>Paths â€” karma, jÃ±Äna, bhakti, dhyÄna, sannyÄsa</a:t>
             </a:r>
             <a:endParaRPr lang="en-US" sz="1100" dirty="0"/>
           </a:p>
@@ -16215,7 +16215,7 @@
                 <a:ea typeface="Cormorant Garamond" pitchFamily="34" charset="-122"/>
                 <a:cs typeface="Cormorant Garamond" pitchFamily="34" charset="-120"/>
               </a:rPr>
-              <a:t>Sādhanā</a:t>
+              <a:t>SÄdhanÄ</a:t>
             </a:r>
             <a:endParaRPr lang="en-US" sz="1300" dirty="0"/>
           </a:p>
@@ -16254,7 +16254,7 @@
                 <a:ea typeface="Cormorant Garamond" pitchFamily="34" charset="-122"/>
                 <a:cs typeface="Cormorant Garamond" pitchFamily="34" charset="-120"/>
               </a:rPr>
-              <a:t>Practices — śraddhā, vairāgya, yajña, tapas, tyāga</a:t>
+              <a:t>Practices â€” Å›raddhÄ, vairÄgya, yajÃ±a, tapas, tyÄga</a:t>
             </a:r>
             <a:endParaRPr lang="en-US" sz="1100" dirty="0"/>
           </a:p>
@@ -16318,7 +16318,7 @@
                 <a:ea typeface="Cormorant Garamond" pitchFamily="34" charset="-122"/>
                 <a:cs typeface="Cormorant Garamond" pitchFamily="34" charset="-120"/>
               </a:rPr>
-              <a:t>Antaḥkaraṇa</a:t>
+              <a:t>Antaá¸¥karaá¹‡a</a:t>
             </a:r>
             <a:endParaRPr lang="en-US" sz="1300" dirty="0"/>
           </a:p>
@@ -16357,7 +16357,7 @@
                 <a:ea typeface="Cormorant Garamond" pitchFamily="34" charset="-122"/>
                 <a:cs typeface="Cormorant Garamond" pitchFamily="34" charset="-120"/>
               </a:rPr>
-              <a:t>Inner instrument — manas, buddhi, ahaṅkāra, indriyas</a:t>
+              <a:t>Inner instrument â€” manas, buddhi, ahaá¹…kÄra, indriyas</a:t>
             </a:r>
             <a:endParaRPr lang="en-US" sz="1100" dirty="0"/>
           </a:p>
@@ -16460,7 +16460,7 @@
                 <a:ea typeface="Cormorant Garamond" pitchFamily="34" charset="-122"/>
                 <a:cs typeface="Cormorant Garamond" pitchFamily="34" charset="-120"/>
               </a:rPr>
-              <a:t>Ethics — svadharma, niṣkāma-karma, sthita-prajña</a:t>
+              <a:t>Ethics â€” svadharma, niá¹£kÄma-karma, sthita-prajÃ±a</a:t>
             </a:r>
             <a:endParaRPr lang="en-US" sz="1100" dirty="0"/>
           </a:p>
@@ -16524,7 +16524,7 @@
                 <a:ea typeface="Cormorant Garamond" pitchFamily="34" charset="-122"/>
                 <a:cs typeface="Cormorant Garamond" pitchFamily="34" charset="-120"/>
               </a:rPr>
-              <a:t>Doṣa</a:t>
+              <a:t>Doá¹£a</a:t>
             </a:r>
             <a:endParaRPr lang="en-US" sz="1300" dirty="0"/>
           </a:p>
@@ -16563,7 +16563,7 @@
                 <a:ea typeface="Cormorant Garamond" pitchFamily="34" charset="-122"/>
                 <a:cs typeface="Cormorant Garamond" pitchFamily="34" charset="-120"/>
               </a:rPr>
-              <a:t>Defects — kāma, krodha, lobha, moha, asat-saṅga</a:t>
+              <a:t>Defects â€” kÄma, krodha, lobha, moha, asat-saá¹…ga</a:t>
             </a:r>
             <a:endParaRPr lang="en-US" sz="1100" dirty="0"/>
           </a:p>
@@ -16666,7 +16666,7 @@
                 <a:ea typeface="Cormorant Garamond" pitchFamily="34" charset="-122"/>
                 <a:cs typeface="Cormorant Garamond" pitchFamily="34" charset="-120"/>
               </a:rPr>
-              <a:t>Goals &amp; states — mokṣa, paramagati, brāhmī-sthiti</a:t>
+              <a:t>Goals &amp; states â€” moká¹£a, paramagati, brÄhmÄ«-sthiti</a:t>
             </a:r>
             <a:endParaRPr lang="en-US" sz="1100" dirty="0"/>
           </a:p>
@@ -16730,7 +16730,7 @@
                 <a:ea typeface="Cormorant Garamond" pitchFamily="34" charset="-122"/>
                 <a:cs typeface="Cormorant Garamond" pitchFamily="34" charset="-120"/>
               </a:rPr>
-              <a:t>Yajña</a:t>
+              <a:t>YajÃ±a</a:t>
             </a:r>
             <a:endParaRPr lang="en-US" sz="1300" dirty="0"/>
           </a:p>
@@ -16769,7 +16769,7 @@
                 <a:ea typeface="Cormorant Garamond" pitchFamily="34" charset="-122"/>
                 <a:cs typeface="Cormorant Garamond" pitchFamily="34" charset="-120"/>
               </a:rPr>
-              <a:t>Sacrifice varieties — dravya, tapo, jñāna, svādhyāya</a:t>
+              <a:t>Sacrifice varieties â€” dravya, tapo, jÃ±Äna, svÄdhyÄya</a:t>
             </a:r>
             <a:endParaRPr lang="en-US" sz="1100" dirty="0"/>
           </a:p>
@@ -16833,7 +16833,7 @@
                 <a:ea typeface="Cormorant Garamond" pitchFamily="34" charset="-122"/>
                 <a:cs typeface="Cormorant Garamond" pitchFamily="34" charset="-120"/>
               </a:rPr>
-              <a:t>Pratīka</a:t>
+              <a:t>PratÄ«ka</a:t>
             </a:r>
             <a:endParaRPr lang="en-US" sz="1300" dirty="0"/>
           </a:p>
@@ -16872,7 +16872,7 @@
                 <a:ea typeface="Cormorant Garamond" pitchFamily="34" charset="-122"/>
                 <a:cs typeface="Cormorant Garamond" pitchFamily="34" charset="-120"/>
               </a:rPr>
-              <a:t>Symbols &amp; metaphors — aśvattha, ratha, praṇava</a:t>
+              <a:t>Symbols &amp; metaphors â€” aÅ›vattha, ratha, praá¹‡ava</a:t>
             </a:r>
             <a:endParaRPr lang="en-US" sz="1100" dirty="0"/>
           </a:p>
@@ -16982,7 +16982,7 @@
                 <a:ea typeface="Cormorant Garamond" pitchFamily="34" charset="-122"/>
                 <a:cs typeface="Cormorant Garamond" pitchFamily="34" charset="-120"/>
               </a:rPr>
-              <a:t>Paramārtha</a:t>
+              <a:t>ParamÄrtha</a:t>
             </a:r>
             <a:endParaRPr lang="en-US" sz="3000" dirty="0"/>
           </a:p>
@@ -17113,7 +17113,7 @@
                 <a:ea typeface="Cormorant Garamond" pitchFamily="34" charset="-122"/>
                 <a:cs typeface="Cormorant Garamond" pitchFamily="34" charset="-120"/>
               </a:rPr>
-              <a:t>Brahman — the Supreme</a:t>
+              <a:t>Brahman â€” the Supreme</a:t>
             </a:r>
             <a:endParaRPr lang="en-US" sz="1300" dirty="0"/>
           </a:p>
@@ -17152,7 +17152,7 @@
                 <a:ea typeface="Cormorant Garamond" pitchFamily="34" charset="-122"/>
                 <a:cs typeface="Cormorant Garamond" pitchFamily="34" charset="-120"/>
               </a:rPr>
-              <a:t>BG 8.3 · 14.27 · 15.18</a:t>
+              <a:t>BG 8.3 Â· 14.27 Â· 15.18</a:t>
             </a:r>
             <a:endParaRPr lang="en-US" sz="950" dirty="0"/>
           </a:p>
@@ -17194,7 +17194,7 @@
                 <a:ea typeface="Cormorant Garamond" pitchFamily="34" charset="-122"/>
                 <a:cs typeface="Cormorant Garamond" pitchFamily="34" charset="-120"/>
               </a:rPr>
-              <a:t>For Madhva, Brahman names Viṣṇu/Nārāyaṇa alone — sarvottama, the puruṣottama beyond kṣara and akṣara. Not a generic 'absolute'.</a:t>
+              <a:t>For Madhva, Brahman names Viá¹£á¹‡u/NÄrÄyaá¹‡a alone â€” sarvottama, the puruá¹£ottama beyond ká¹£ara and aká¹£ara. Not a generic 'absolute'.</a:t>
             </a:r>
             <a:endParaRPr lang="en-US" sz="1050" dirty="0"/>
           </a:p>
@@ -17283,7 +17283,7 @@
                 <a:ea typeface="Cormorant Garamond" pitchFamily="34" charset="-122"/>
                 <a:cs typeface="Cormorant Garamond" pitchFamily="34" charset="-120"/>
               </a:rPr>
-              <a:t>Paramātman — the indweller</a:t>
+              <a:t>ParamÄtman â€” the indweller</a:t>
             </a:r>
             <a:endParaRPr lang="en-US" sz="1300" dirty="0"/>
           </a:p>
@@ -17322,7 +17322,7 @@
                 <a:ea typeface="Cormorant Garamond" pitchFamily="34" charset="-122"/>
                 <a:cs typeface="Cormorant Garamond" pitchFamily="34" charset="-120"/>
               </a:rPr>
-              <a:t>BG 13.22 · 15.17</a:t>
+              <a:t>BG 13.22 Â· 15.17</a:t>
             </a:r>
             <a:endParaRPr lang="en-US" sz="950" dirty="0"/>
           </a:p>
@@ -17364,7 +17364,7 @@
                 <a:ea typeface="Cormorant Garamond" pitchFamily="34" charset="-122"/>
                 <a:cs typeface="Cormorant Garamond" pitchFamily="34" charset="-120"/>
               </a:rPr>
-              <a:t>The 'highest Self' standing in every body as the witness, sustainer, ordainer. Distinct from jīva (BG 15.17).</a:t>
+              <a:t>The 'highest Self' standing in every body as the witness, sustainer, ordainer. Distinct from jÄ«va (BG 15.17).</a:t>
             </a:r>
             <a:endParaRPr lang="en-US" sz="1050" dirty="0"/>
           </a:p>
@@ -17453,7 +17453,7 @@
                 <a:ea typeface="Cormorant Garamond" pitchFamily="34" charset="-122"/>
                 <a:cs typeface="Cormorant Garamond" pitchFamily="34" charset="-120"/>
               </a:rPr>
-              <a:t>Puruṣottama — the supreme person</a:t>
+              <a:t>Puruá¹£ottama â€” the supreme person</a:t>
             </a:r>
             <a:endParaRPr lang="en-US" sz="1300" dirty="0"/>
           </a:p>
@@ -17492,7 +17492,7 @@
                 <a:ea typeface="Cormorant Garamond" pitchFamily="34" charset="-122"/>
                 <a:cs typeface="Cormorant Garamond" pitchFamily="34" charset="-120"/>
               </a:rPr>
-              <a:t>BG 15.18–19</a:t>
+              <a:t>BG 15.18â€“19</a:t>
             </a:r>
             <a:endParaRPr lang="en-US" sz="950" dirty="0"/>
           </a:p>
@@ -17534,7 +17534,7 @@
                 <a:ea typeface="Cormorant Garamond" pitchFamily="34" charset="-122"/>
                 <a:cs typeface="Cormorant Garamond" pitchFamily="34" charset="-120"/>
               </a:rPr>
-              <a:t>Krishna's self-designation as the puruṣa beyond the perishable and the imperishable. The hermeneutic center of Ch 15.</a:t>
+              <a:t>Krishna's self-designation as the puruá¹£a beyond the perishable and the imperishable. The hermeneutic center of Ch 15.</a:t>
             </a:r>
             <a:endParaRPr lang="en-US" sz="1050" dirty="0"/>
           </a:p>
@@ -17623,7 +17623,7 @@
                 <a:ea typeface="Cormorant Garamond" pitchFamily="34" charset="-122"/>
                 <a:cs typeface="Cormorant Garamond" pitchFamily="34" charset="-120"/>
               </a:rPr>
-              <a:t>The imperishable puruṣa</a:t>
+              <a:t>The imperishable puruá¹£a</a:t>
             </a:r>
             <a:endParaRPr lang="en-US" sz="1300" dirty="0"/>
           </a:p>
@@ -17704,7 +17704,7 @@
                 <a:ea typeface="Cormorant Garamond" pitchFamily="34" charset="-122"/>
                 <a:cs typeface="Cormorant Garamond" pitchFamily="34" charset="-120"/>
               </a:rPr>
-              <a:t>The kūṭa-stha — for Madhva, Lakṣmī, the eternally-liberated jīva-gaṇa-mukhya. Sarvottama after Hari.</a:t>
+              <a:t>The kÅ«á¹­a-stha â€” for Madhva, Laká¹£mÄ«, the eternally-liberated jÄ«va-gaá¹‡a-mukhya. Sarvottama after Hari.</a:t>
             </a:r>
             <a:endParaRPr lang="en-US" sz="1050" dirty="0"/>
           </a:p>
@@ -18026,7 +18026,7 @@
                 <a:ea typeface="Cormorant Garamond" pitchFamily="34" charset="-122"/>
                 <a:cs typeface="Cormorant Garamond" pitchFamily="34" charset="-120"/>
               </a:rPr>
-              <a:t>An eternal aṃśa of Hari (BG 15.7) — real, distinct, plural, never merged with Brahman. Bound by avidyā until released.</a:t>
+              <a:t>An eternal aá¹ƒÅ›a of Hari (BG 15.7) â€” real, distinct, plural, never merged with Brahman. Bound by avidyÄ until released.</a:t>
             </a:r>
             <a:endParaRPr lang="en-US" sz="1050" dirty="0"/>
           </a:p>
@@ -18154,7 +18154,7 @@
                 <a:ea typeface="Cormorant Garamond" pitchFamily="34" charset="-122"/>
                 <a:cs typeface="Cormorant Garamond" pitchFamily="34" charset="-120"/>
               </a:rPr>
-              <a:t>BG 7.4–5 · 9.10</a:t>
+              <a:t>BG 7.4â€“5 Â· 9.10</a:t>
             </a:r>
             <a:endParaRPr lang="en-US" sz="950" dirty="0"/>
           </a:p>
@@ -18196,7 +18196,7 @@
                 <a:ea typeface="Cormorant Garamond" pitchFamily="34" charset="-122"/>
                 <a:cs typeface="Cormorant Garamond" pitchFamily="34" charset="-120"/>
               </a:rPr>
-              <a:t>Hari's own lower nature — eightfold: earth, water, fire, air, ether, manas, buddhi, ahaṅkāra. The womb of all forms.</a:t>
+              <a:t>Hari's own lower nature â€” eightfold: earth, water, fire, air, ether, manas, buddhi, ahaá¹…kÄra. The womb of all forms.</a:t>
             </a:r>
             <a:endParaRPr lang="en-US" sz="1050" dirty="0"/>
           </a:p>
@@ -18324,7 +18324,7 @@
                 <a:ea typeface="Cormorant Garamond" pitchFamily="34" charset="-122"/>
                 <a:cs typeface="Cormorant Garamond" pitchFamily="34" charset="-120"/>
               </a:rPr>
-              <a:t>BG 5.14 · 8.3 · 18.41</a:t>
+              <a:t>BG 5.14 Â· 8.3 Â· 18.41</a:t>
             </a:r>
             <a:endParaRPr lang="en-US" sz="950" dirty="0"/>
           </a:p>
@@ -18366,7 +18366,7 @@
                 <a:ea typeface="Cormorant Garamond" pitchFamily="34" charset="-122"/>
                 <a:cs typeface="Cormorant Garamond" pitchFamily="34" charset="-120"/>
               </a:rPr>
-              <a:t>Each jīva has a beginningless intrinsic nature (sva-rūpa-yogyatā in Madhva). Determines varṇa, capacities, and ultimate destination.</a:t>
+              <a:t>Each jÄ«va has a beginningless intrinsic nature (sva-rÅ«pa-yogyatÄ in Madhva). Determines vará¹‡a, capacities, and ultimate destination.</a:t>
             </a:r>
             <a:endParaRPr lang="en-US" sz="1050" dirty="0"/>
           </a:p>
@@ -18536,7 +18536,7 @@
                 <a:ea typeface="Cormorant Garamond" pitchFamily="34" charset="-122"/>
                 <a:cs typeface="Cormorant Garamond" pitchFamily="34" charset="-120"/>
               </a:rPr>
-              <a:t>Hari as antaryāmī — stands in every heart and directs (yantra-ārūḍha-māyā) the jīvas as if mounted on a machine.</a:t>
+              <a:t>Hari as antaryÄmÄ« â€” stands in every heart and directs (yantra-ÄrÅ«á¸ha-mÄyÄ) the jÄ«vas as if mounted on a machine.</a:t>
             </a:r>
             <a:endParaRPr lang="en-US" sz="1050" dirty="0"/>
           </a:p>
@@ -18646,7 +18646,7 @@
                 <a:ea typeface="Cormorant Garamond" pitchFamily="34" charset="-122"/>
                 <a:cs typeface="Cormorant Garamond" pitchFamily="34" charset="-120"/>
               </a:rPr>
-              <a:t>Kṣetra-Kṣetrajña</a:t>
+              <a:t>Ká¹£etra-Ká¹£etrajÃ±a</a:t>
             </a:r>
             <a:endParaRPr lang="en-US" sz="3000" dirty="0"/>
           </a:p>
@@ -18858,7 +18858,7 @@
                 <a:ea typeface="Cormorant Garamond" pitchFamily="34" charset="-122"/>
                 <a:cs typeface="Cormorant Garamond" pitchFamily="34" charset="-120"/>
               </a:rPr>
-              <a:t>The witness who knows the field. Krishna: 'kṣetrajñaṃ cāpi māṃ viddhi sarva-kṣetreṣu bhārata' — Hari is the highest kṣetrajña.</a:t>
+              <a:t>The witness who knows the field. Krishna: 'ká¹£etrajÃ±aá¹ƒ cÄpi mÄá¹ƒ viddhi sarva-ká¹£etreá¹£u bhÄrata' â€” Hari is the highest ká¹£etrajÃ±a.</a:t>
             </a:r>
             <a:endParaRPr lang="en-US" sz="1050" dirty="0"/>
           </a:p>
@@ -18986,7 +18986,7 @@
                 <a:ea typeface="Cormorant Garamond" pitchFamily="34" charset="-122"/>
                 <a:cs typeface="Cormorant Garamond" pitchFamily="34" charset="-120"/>
               </a:rPr>
-              <a:t>BG 13.1 · 13.5–6</a:t>
+              <a:t>BG 13.1 Â· 13.5â€“6</a:t>
             </a:r>
             <a:endParaRPr lang="en-US" sz="950" dirty="0"/>
           </a:p>
@@ -19028,7 +19028,7 @@
                 <a:ea typeface="Cormorant Garamond" pitchFamily="34" charset="-122"/>
                 <a:cs typeface="Cormorant Garamond" pitchFamily="34" charset="-120"/>
               </a:rPr>
-              <a:t>This body, with its 24 elements (mahābhūtas, ahaṅkāra, buddhi, avyakta, indriyas, mind, viṣayas, will, dveṣa, sukha, duḥkha, saṅghāta, cetanā, dhṛti).</a:t>
+              <a:t>This body, with its 24 elements (mahÄbhÅ«tas, ahaá¹…kÄra, buddhi, avyakta, indriyas, mind, viá¹£ayas, will, dveá¹£a, sukha, duá¸¥kha, saá¹…ghÄta, cetanÄ, dhá¹›ti).</a:t>
             </a:r>
             <a:endParaRPr lang="en-US" sz="1050" dirty="0"/>
           </a:p>
@@ -19198,7 +19198,7 @@
                 <a:ea typeface="Cormorant Garamond" pitchFamily="34" charset="-122"/>
                 <a:cs typeface="Cormorant Garamond" pitchFamily="34" charset="-120"/>
               </a:rPr>
-              <a:t>Earth, water, fire, air, ether — first five of the 24 kṣetra constituents.</a:t>
+              <a:t>Earth, water, fire, air, ether â€” first five of the 24 ká¹£etra constituents.</a:t>
             </a:r>
             <a:endParaRPr lang="en-US" sz="1050" dirty="0"/>
           </a:p>
@@ -19326,7 +19326,7 @@
                 <a:ea typeface="Cormorant Garamond" pitchFamily="34" charset="-122"/>
                 <a:cs typeface="Cormorant Garamond" pitchFamily="34" charset="-120"/>
               </a:rPr>
-              <a:t>BG 13.5 · 8.18</a:t>
+              <a:t>BG 13.5 Â· 8.18</a:t>
             </a:r>
             <a:endParaRPr lang="en-US" sz="950" dirty="0"/>
           </a:p>
@@ -19368,7 +19368,7 @@
                 <a:ea typeface="Cormorant Garamond" pitchFamily="34" charset="-122"/>
                 <a:cs typeface="Cormorant Garamond" pitchFamily="34" charset="-120"/>
               </a:rPr>
-              <a:t>Mūla-prakṛti before evolutes. From it emerge mahat, ahaṅkāra, and the tanmātras.</a:t>
+              <a:t>MÅ«la-praká¹›ti before evolutes. From it emerge mahat, ahaá¹…kÄra, and the tanmÄtras.</a:t>
             </a:r>
             <a:endParaRPr lang="en-US" sz="1050" dirty="0"/>
           </a:p>
@@ -19478,7 +19478,7 @@
                 <a:ea typeface="Cormorant Garamond" pitchFamily="34" charset="-122"/>
                 <a:cs typeface="Cormorant Garamond" pitchFamily="34" charset="-120"/>
               </a:rPr>
-              <a:t>Guṇa</a:t>
+              <a:t>Guá¹‡a</a:t>
             </a:r>
             <a:endParaRPr lang="en-US" sz="3000" dirty="0"/>
           </a:p>
@@ -19648,7 +19648,7 @@
                 <a:ea typeface="Cormorant Garamond" pitchFamily="34" charset="-122"/>
                 <a:cs typeface="Cormorant Garamond" pitchFamily="34" charset="-120"/>
               </a:rPr>
-              <a:t>BG 14.6 · 14.11</a:t>
+              <a:t>BG 14.6 Â· 14.11</a:t>
             </a:r>
             <a:endParaRPr lang="en-US" sz="950" dirty="0"/>
           </a:p>
@@ -19690,7 +19690,7 @@
                 <a:ea typeface="Cormorant Garamond" pitchFamily="34" charset="-122"/>
                 <a:cs typeface="Cormorant Garamond" pitchFamily="34" charset="-120"/>
               </a:rPr>
-              <a:t>Light, luminous, healthful — binds the jīva through attachment to happiness and knowledge. Predominates in the wise.</a:t>
+              <a:t>Light, luminous, healthful â€” binds the jÄ«va through attachment to happiness and knowledge. Predominates in the wise.</a:t>
             </a:r>
             <a:endParaRPr lang="en-US" sz="1050" dirty="0"/>
           </a:p>
@@ -19818,7 +19818,7 @@
                 <a:ea typeface="Cormorant Garamond" pitchFamily="34" charset="-122"/>
                 <a:cs typeface="Cormorant Garamond" pitchFamily="34" charset="-120"/>
               </a:rPr>
-              <a:t>BG 14.7 · 14.12</a:t>
+              <a:t>BG 14.7 Â· 14.12</a:t>
             </a:r>
             <a:endParaRPr lang="en-US" sz="950" dirty="0"/>
           </a:p>
@@ -19860,7 +19860,7 @@
                 <a:ea typeface="Cormorant Garamond" pitchFamily="34" charset="-122"/>
                 <a:cs typeface="Cormorant Garamond" pitchFamily="34" charset="-120"/>
               </a:rPr>
-              <a:t>Of the nature of craving and attachment; born of thirst (tṛṣṇā) and clinging (saṅga). Drives ceaseless action.</a:t>
+              <a:t>Of the nature of craving and attachment; born of thirst (tá¹›á¹£á¹‡Ä) and clinging (saá¹…ga). Drives ceaseless action.</a:t>
             </a:r>
             <a:endParaRPr lang="en-US" sz="1050" dirty="0"/>
           </a:p>
@@ -19988,7 +19988,7 @@
                 <a:ea typeface="Cormorant Garamond" pitchFamily="34" charset="-122"/>
                 <a:cs typeface="Cormorant Garamond" pitchFamily="34" charset="-120"/>
               </a:rPr>
-              <a:t>BG 14.8 · 14.13</a:t>
+              <a:t>BG 14.8 Â· 14.13</a:t>
             </a:r>
             <a:endParaRPr lang="en-US" sz="950" dirty="0"/>
           </a:p>
@@ -20030,7 +20030,7 @@
                 <a:ea typeface="Cormorant Garamond" pitchFamily="34" charset="-122"/>
                 <a:cs typeface="Cormorant Garamond" pitchFamily="34" charset="-120"/>
               </a:rPr>
-              <a:t>Born of ajñāna — deludes all embodied beings; binds through negligence, indolence, sleep.</a:t>
+              <a:t>Born of ajÃ±Äna â€” deludes all embodied beings; binds through negligence, indolence, sleep.</a:t>
             </a:r>
             <a:endParaRPr lang="en-US" sz="1050" dirty="0"/>
           </a:p>
@@ -20119,7 +20119,7 @@
                 <a:ea typeface="Cormorant Garamond" pitchFamily="34" charset="-122"/>
                 <a:cs typeface="Cormorant Garamond" pitchFamily="34" charset="-120"/>
               </a:rPr>
-              <a:t>Beyond the guṇas</a:t>
+              <a:t>Beyond the guá¹‡as</a:t>
             </a:r>
             <a:endParaRPr lang="en-US" sz="1300" dirty="0"/>
           </a:p>
@@ -20158,7 +20158,7 @@
                 <a:ea typeface="Cormorant Garamond" pitchFamily="34" charset="-122"/>
                 <a:cs typeface="Cormorant Garamond" pitchFamily="34" charset="-120"/>
               </a:rPr>
-              <a:t>BG 14.22–25</a:t>
+              <a:t>BG 14.22â€“25</a:t>
             </a:r>
             <a:endParaRPr lang="en-US" sz="950" dirty="0"/>
           </a:p>
@@ -20200,7 +20200,7 @@
                 <a:ea typeface="Cormorant Garamond" pitchFamily="34" charset="-122"/>
                 <a:cs typeface="Cormorant Garamond" pitchFamily="34" charset="-120"/>
               </a:rPr>
-              <a:t>One in whom no guṇa-impulse arises by attachment; treats friend and foe alike; abandons all undertakings.</a:t>
+              <a:t>One in whom no guá¹‡a-impulse arises by attachment; treats friend and foe alike; abandons all undertakings.</a:t>
             </a:r>
             <a:endParaRPr lang="en-US" sz="1050" dirty="0"/>
           </a:p>
@@ -20480,7 +20480,7 @@
                 <a:ea typeface="Cormorant Garamond" pitchFamily="34" charset="-122"/>
                 <a:cs typeface="Cormorant Garamond" pitchFamily="34" charset="-120"/>
               </a:rPr>
-              <a:t>BG 9.22 · 11.54 · 18.55</a:t>
+              <a:t>BG 9.22 Â· 11.54 Â· 18.55</a:t>
             </a:r>
             <a:endParaRPr lang="en-US" sz="950" dirty="0"/>
           </a:p>
@@ -20522,7 +20522,7 @@
                 <a:ea typeface="Cormorant Garamond" pitchFamily="34" charset="-122"/>
                 <a:cs typeface="Cormorant Garamond" pitchFamily="34" charset="-120"/>
               </a:rPr>
-              <a:t>Loving knowledge of Hari that exceeds all other knowledge. For Madhva, bhakti is sthira-jñāna-pūrvika-prema — the indispensable cause of mokṣa.</a:t>
+              <a:t>Loving knowledge of Hari that exceeds all other knowledge. For Madhva, bhakti is sthira-jÃ±Äna-pÅ«rvika-prema â€” the indispensable cause of moká¹£a.</a:t>
             </a:r>
             <a:endParaRPr lang="en-US" sz="1050" dirty="0"/>
           </a:p>
@@ -20692,7 +20692,7 @@
                 <a:ea typeface="Cormorant Garamond" pitchFamily="34" charset="-122"/>
                 <a:cs typeface="Cormorant Garamond" pitchFamily="34" charset="-120"/>
               </a:rPr>
-              <a:t>'sarva-dharmān parityajya mām ekaṃ śaraṇaṃ vraja' — the closing teaching. Total taking-of-refuge in Hari, who then absolves all sin.</a:t>
+              <a:t>'sarva-dharmÄn parityajya mÄm ekaá¹ƒ Å›araá¹‡aá¹ƒ vraja' â€” the closing teaching. Total taking-of-refuge in Hari, who then absolves all sin.</a:t>
             </a:r>
             <a:endParaRPr lang="en-US" sz="1050" dirty="0"/>
           </a:p>
@@ -20820,7 +20820,7 @@
                 <a:ea typeface="Cormorant Garamond" pitchFamily="34" charset="-122"/>
                 <a:cs typeface="Cormorant Garamond" pitchFamily="34" charset="-120"/>
               </a:rPr>
-              <a:t>BG 3.3 · 3.19 · 5.2</a:t>
+              <a:t>BG 3.3 Â· 3.19 Â· 5.2</a:t>
             </a:r>
             <a:endParaRPr lang="en-US" sz="950" dirty="0"/>
           </a:p>
@@ -20990,7 +20990,7 @@
                 <a:ea typeface="Cormorant Garamond" pitchFamily="34" charset="-122"/>
                 <a:cs typeface="Cormorant Garamond" pitchFamily="34" charset="-120"/>
               </a:rPr>
-              <a:t>BG 3.3 · 4.33–38</a:t>
+              <a:t>BG 3.3 Â· 4.33â€“38</a:t>
             </a:r>
             <a:endParaRPr lang="en-US" sz="950" dirty="0"/>
           </a:p>
@@ -21032,7 +21032,7 @@
                 <a:ea typeface="Cormorant Garamond" pitchFamily="34" charset="-122"/>
                 <a:cs typeface="Cormorant Garamond" pitchFamily="34" charset="-120"/>
               </a:rPr>
-              <a:t>Knowing Hari as supreme, jīva as His aṃśa, world as His dependent reality. The means for the qualified.</a:t>
+              <a:t>Knowing Hari as supreme, jÄ«va as His aá¹ƒÅ›a, world as His dependent reality. The means for the qualified.</a:t>
             </a:r>
             <a:endParaRPr lang="en-US" sz="1050" dirty="0"/>
           </a:p>
@@ -21142,7 +21142,7 @@
                 <a:ea typeface="Cormorant Garamond" pitchFamily="34" charset="-122"/>
                 <a:cs typeface="Cormorant Garamond" pitchFamily="34" charset="-120"/>
               </a:rPr>
-              <a:t>Sādhanā</a:t>
+              <a:t>SÄdhanÄ</a:t>
             </a:r>
             <a:endParaRPr lang="en-US" sz="3000" dirty="0"/>
           </a:p>
@@ -21312,7 +21312,7 @@
                 <a:ea typeface="Cormorant Garamond" pitchFamily="34" charset="-122"/>
                 <a:cs typeface="Cormorant Garamond" pitchFamily="34" charset="-120"/>
               </a:rPr>
-              <a:t>BG 17.2–3</a:t>
+              <a:t>BG 17.2â€“3</a:t>
             </a:r>
             <a:endParaRPr lang="en-US" sz="950" dirty="0"/>
           </a:p>
@@ -21354,7 +21354,7 @@
                 <a:ea typeface="Cormorant Garamond" pitchFamily="34" charset="-122"/>
                 <a:cs typeface="Cormorant Garamond" pitchFamily="34" charset="-120"/>
               </a:rPr>
-              <a:t>Faith follows one's nature; one is what one's faith is. Threefold by guṇa — sāttvika in gods, rājasa in yakṣas, tāmasa in spirits.</a:t>
+              <a:t>Faith follows one's nature; one is what one's faith is. Threefold by guá¹‡a â€” sÄttvika in gods, rÄjasa in yaká¹£as, tÄmasa in spirits.</a:t>
             </a:r>
             <a:endParaRPr lang="en-US" sz="1050" dirty="0"/>
           </a:p>
@@ -21482,7 +21482,7 @@
                 <a:ea typeface="Cormorant Garamond" pitchFamily="34" charset="-122"/>
                 <a:cs typeface="Cormorant Garamond" pitchFamily="34" charset="-120"/>
               </a:rPr>
-              <a:t>BG 6.35 · 13.8–11</a:t>
+              <a:t>BG 6.35 Â· 13.8â€“11</a:t>
             </a:r>
             <a:endParaRPr lang="en-US" sz="950" dirty="0"/>
           </a:p>
@@ -21524,7 +21524,7 @@
                 <a:ea typeface="Cormorant Garamond" pitchFamily="34" charset="-122"/>
                 <a:cs typeface="Cormorant Garamond" pitchFamily="34" charset="-120"/>
               </a:rPr>
-              <a:t>Detachment from sense-objects — not life-rejection but the seeing-through of binding attractions.</a:t>
+              <a:t>Detachment from sense-objects â€” not life-rejection but the seeing-through of binding attractions.</a:t>
             </a:r>
             <a:endParaRPr lang="en-US" sz="1050" dirty="0"/>
           </a:p>
@@ -21652,7 +21652,7 @@
                 <a:ea typeface="Cormorant Garamond" pitchFamily="34" charset="-122"/>
                 <a:cs typeface="Cormorant Garamond" pitchFamily="34" charset="-120"/>
               </a:rPr>
-              <a:t>BG 6.26 · 12.9</a:t>
+              <a:t>BG 6.26 Â· 12.9</a:t>
             </a:r>
             <a:endParaRPr lang="en-US" sz="950" dirty="0"/>
           </a:p>
@@ -21694,7 +21694,7 @@
                 <a:ea typeface="Cormorant Garamond" pitchFamily="34" charset="-122"/>
                 <a:cs typeface="Cormorant Garamond" pitchFamily="34" charset="-120"/>
               </a:rPr>
-              <a:t>The 'samādhi-abhyāsa' — bringing back the wandering mind, again and again, to Hari.</a:t>
+              <a:t>The 'samÄdhi-abhyÄsa' â€” bringing back the wandering mind, again and again, to Hari.</a:t>
             </a:r>
             <a:endParaRPr lang="en-US" sz="1050" dirty="0"/>
           </a:p>
@@ -21822,7 +21822,7 @@
                 <a:ea typeface="Cormorant Garamond" pitchFamily="34" charset="-122"/>
                 <a:cs typeface="Cormorant Garamond" pitchFamily="34" charset="-120"/>
               </a:rPr>
-              <a:t>BG 17.14–19</a:t>
+              <a:t>BG 17.14â€“19</a:t>
             </a:r>
             <a:endParaRPr lang="en-US" sz="950" dirty="0"/>
           </a:p>
@@ -21864,7 +21864,7 @@
                 <a:ea typeface="Cormorant Garamond" pitchFamily="34" charset="-122"/>
                 <a:cs typeface="Cormorant Garamond" pitchFamily="34" charset="-120"/>
               </a:rPr>
-              <a:t>Tapas of body (worship/cleanliness/celibacy), of speech (truth/kindness/study), of mind (serenity/silence/self-control). All threefold by guṇa.</a:t>
+              <a:t>Tapas of body (worship/cleanliness/celibacy), of speech (truth/kindness/study), of mind (serenity/silence/self-control). All threefold by guá¹‡a.</a:t>
             </a:r>
             <a:endParaRPr lang="en-US" sz="1050" dirty="0"/>
           </a:p>
